--- a/docs/onboarding/08-skill-creator.pptx
+++ b/docs/onboarding/08-skill-creator.pptx
@@ -1551,7 +1551,7 @@
                 <a:ea typeface="Arial" pitchFamily="34" charset="-122"/>
                 <a:cs typeface="Arial" pitchFamily="34" charset="-120"/>
               </a:rPr>
-              <a:t>TRADE-IMPORTS-ANIMALS ONBOARDING</a:t>
+              <a:t>TRADE-IMPORTS WORKSPACE ONBOARDING</a:t>
             </a:r>
             <a:endParaRPr lang="en-US" sz="1400" dirty="0"/>
           </a:p>
@@ -2292,7 +2292,7 @@
                 <a:ea typeface="Arial" pitchFamily="34" charset="-122"/>
                 <a:cs typeface="Arial" pitchFamily="34" charset="-120"/>
               </a:rPr>
-              <a:t>trade-imports-animals onboarding</a:t>
+              <a:t>trade-imports workspace onboarding</a:t>
             </a:r>
             <a:endParaRPr lang="en-US" sz="900" dirty="0"/>
           </a:p>
@@ -2913,7 +2913,7 @@
                 <a:ea typeface="Arial" pitchFamily="34" charset="-122"/>
                 <a:cs typeface="Arial" pitchFamily="34" charset="-120"/>
               </a:rPr>
-              <a:t>trade-imports-animals onboarding</a:t>
+              <a:t>trade-imports workspace onboarding</a:t>
             </a:r>
             <a:endParaRPr lang="en-US" sz="900" dirty="0"/>
           </a:p>
@@ -3802,7 +3802,7 @@
                 <a:ea typeface="Arial" pitchFamily="34" charset="-122"/>
                 <a:cs typeface="Arial" pitchFamily="34" charset="-120"/>
               </a:rPr>
-              <a:t>trade-imports-animals onboarding</a:t>
+              <a:t>trade-imports workspace onboarding</a:t>
             </a:r>
             <a:endParaRPr lang="en-US" sz="900" dirty="0"/>
           </a:p>
@@ -4403,7 +4403,7 @@
                 <a:ea typeface="Arial" pitchFamily="34" charset="-122"/>
                 <a:cs typeface="Arial" pitchFamily="34" charset="-120"/>
               </a:rPr>
-              <a:t>trade-imports-animals onboarding</a:t>
+              <a:t>trade-imports workspace onboarding</a:t>
             </a:r>
             <a:endParaRPr lang="en-US" sz="900" dirty="0"/>
           </a:p>
@@ -4965,7 +4965,7 @@
                 <a:ea typeface="Arial" pitchFamily="34" charset="-122"/>
                 <a:cs typeface="Arial" pitchFamily="34" charset="-120"/>
               </a:rPr>
-              <a:t>trade-imports-animals onboarding</a:t>
+              <a:t>trade-imports workspace onboarding</a:t>
             </a:r>
             <a:endParaRPr lang="en-US" sz="900" dirty="0"/>
           </a:p>
@@ -5645,7 +5645,7 @@
                 <a:ea typeface="Arial" pitchFamily="34" charset="-122"/>
                 <a:cs typeface="Arial" pitchFamily="34" charset="-120"/>
               </a:rPr>
-              <a:t>trade-imports-animals onboarding</a:t>
+              <a:t>trade-imports workspace onboarding</a:t>
             </a:r>
             <a:endParaRPr lang="en-US" sz="900" dirty="0"/>
           </a:p>
